--- a/tests/fixtures/chart-gallery.pptx
+++ b/tests/fixtures/chart-gallery.pptx
@@ -762,7 +762,7 @@
             </a:pPr>
             <a:r>
               <a:rPr lang="en-US" sz="1400" b="0"/>
-              <a:t>Surface (deferred)</a:t>
+              <a:t>Surface by quarter</a:t>
             </a:r>
           </a:p>
         </c:rich>
@@ -3746,7 +3746,7 @@
                   <a:srgbClr val="334155"/>
                 </a:solidFill>
               </a:rPr>
-              <a:t>12  surfaceChart - deferred: expect an empty frame and a warning</a:t>
+              <a:t>12  surfaceChart - a lit mesh banded by value, with a legend of bands</a:t>
             </a:r>
             <a:endParaRPr lang="en-US" sz="1000"/>
           </a:p>
